--- a/a7/packages/A7 Unit 6 - Relationships in Triangles/Lessons/6.06/A7 6.06 Real-World Coordinate-Plane Problems; Perimeter - Slides.pptx
+++ b/a7/packages/A7 Unit 6 - Relationships in Triangles/Lessons/6.06/A7 6.06 Real-World Coordinate-Plane Problems; Perimeter - Slides.pptx
@@ -20996,7 +20996,7 @@
         <p:spPr>
           <a:xfrm>
             <a:off x="6461091" y="4573391"/>
-            <a:ext cx="798851" cy="377686"/>
+            <a:ext cx="343246" cy="377686"/>
           </a:xfrm>
           <a:prstGeom prst="rect">
             <a:avLst/>
@@ -21017,7 +21017,7 @@
                 </a:solidFill>
                 <a:latin typeface="Lexend"/>
               </a:rPr>
-              <a:t> and </a:t>
+              <a:t>, </a:t>
             </a:r>
           </a:p>
         </p:txBody>
@@ -21038,7 +21038,7 @@
         </p:blipFill>
         <p:spPr>
           <a:xfrm>
-            <a:off x="7122783" y="4645152"/>
+            <a:off x="6667178" y="4645152"/>
             <a:ext cx="715087" cy="234165"/>
           </a:xfrm>
           <a:prstGeom prst="rect">
@@ -21054,8 +21054,8 @@
         </p:nvSpPr>
         <p:spPr>
           <a:xfrm>
-            <a:off x="7837870" y="4573391"/>
-            <a:ext cx="3410934" cy="377686"/>
+            <a:off x="7382265" y="4573391"/>
+            <a:ext cx="798851" cy="377686"/>
           </a:xfrm>
           <a:prstGeom prst="rect">
             <a:avLst/>
@@ -21076,21 +21076,45 @@
                 </a:solidFill>
                 <a:latin typeface="Lexend"/>
               </a:rPr>
-              <a:t>. Find its fourth corner and </a:t>
-            </a:r>
-          </a:p>
-        </p:txBody>
-      </p:sp>
-      <p:sp>
-        <p:nvSpPr>
-          <p:cNvPr id="56" name="TextBox 55"/>
-          <p:cNvSpPr txBox="1"/>
-          <p:nvPr/>
-        </p:nvSpPr>
-        <p:spPr>
-          <a:xfrm>
-            <a:off x="1554480" y="4940741"/>
-            <a:ext cx="3095108" cy="377686"/>
+              <a:t> and </a:t>
+            </a:r>
+          </a:p>
+        </p:txBody>
+      </p:sp>
+      <p:pic>
+        <p:nvPicPr>
+          <p:cNvPr id="56" name="Picture 55" descr="3c9a30b1926c4727.png"/>
+          <p:cNvPicPr>
+            <a:picLocks noChangeAspect="1"/>
+          </p:cNvPicPr>
+          <p:nvPr/>
+        </p:nvPicPr>
+        <p:blipFill>
+          <a:blip r:embed="rId19"/>
+          <a:stretch>
+            <a:fillRect/>
+          </a:stretch>
+        </p:blipFill>
+        <p:spPr>
+          <a:xfrm>
+            <a:off x="8043956" y="4645152"/>
+            <a:ext cx="861126" cy="234165"/>
+          </a:xfrm>
+          <a:prstGeom prst="rect">
+            <a:avLst/>
+          </a:prstGeom>
+        </p:spPr>
+      </p:pic>
+      <p:sp>
+        <p:nvSpPr>
+          <p:cNvPr id="57" name="TextBox 56"/>
+          <p:cNvSpPr txBox="1"/>
+          <p:nvPr/>
+        </p:nvSpPr>
+        <p:spPr>
+          <a:xfrm>
+            <a:off x="8905083" y="4573391"/>
+            <a:ext cx="1977827" cy="377686"/>
           </a:xfrm>
           <a:prstGeom prst="rect">
             <a:avLst/>
@@ -21111,7 +21135,42 @@
                 </a:solidFill>
                 <a:latin typeface="Lexend"/>
               </a:rPr>
-              <a:t>the length of a diagonal.</a:t>
+              <a:t>. How long is a </a:t>
+            </a:r>
+          </a:p>
+        </p:txBody>
+      </p:sp>
+      <p:sp>
+        <p:nvSpPr>
+          <p:cNvPr id="58" name="TextBox 57"/>
+          <p:cNvSpPr txBox="1"/>
+          <p:nvPr/>
+        </p:nvSpPr>
+        <p:spPr>
+          <a:xfrm>
+            <a:off x="1554480" y="4940741"/>
+            <a:ext cx="1376449" cy="377686"/>
+          </a:xfrm>
+          <a:prstGeom prst="rect">
+            <a:avLst/>
+          </a:prstGeom>
+          <a:noFill/>
+        </p:spPr>
+        <p:txBody>
+          <a:bodyPr wrap="none" lIns="45720" rIns="45720" tIns="18288" bIns="18288" anchor="ctr">
+            <a:noAutofit/>
+          </a:bodyPr>
+          <a:lstStyle/>
+          <a:p>
+            <a:pPr algn="l"/>
+            <a:r>
+              <a:rPr sz="1810" b="0" i="0">
+                <a:solidFill>
+                  <a:srgbClr val="1A1A1A"/>
+                </a:solidFill>
+                <a:latin typeface="Lexend"/>
+              </a:rPr>
+              <a:t>diagonal?</a:t>
             </a:r>
           </a:p>
         </p:txBody>
@@ -22057,7 +22116,7 @@
                 </a:solidFill>
                 <a:latin typeface="Lexend"/>
               </a:rPr>
-              <a:t>the length of the one segment between two points — on a map, as the crow flies</a:t>
+              <a:t>the length of the one segment between two points — on a map, straight across, not along the streets</a:t>
             </a:r>
           </a:p>
         </p:txBody>

--- a/a7/packages/A7 Unit 6 - Relationships in Triangles/Lessons/6.06/A7 6.06 Real-World Coordinate-Plane Problems; Perimeter - Slides.pptx
+++ b/a7/packages/A7 Unit 6 - Relationships in Triangles/Lessons/6.06/A7 6.06 Real-World Coordinate-Plane Problems; Perimeter - Slides.pptx
@@ -21608,7 +21608,7 @@
                 </a:solidFill>
                 <a:latin typeface="Lexend"/>
               </a:rPr>
-              <a:t>Every skill listed is required, to a SmartScore of 67. Due at the start of the next class.</a:t>
+              <a:t>Every skill listed is required, to a SmartScore of 67. Due by the Unit 6 test.</a:t>
             </a:r>
           </a:p>
         </p:txBody>

--- a/a7/packages/A7 Unit 6 - Relationships in Triangles/Lessons/6.06/A7 6.06 Real-World Coordinate-Plane Problems; Perimeter - Slides.pptx
+++ b/a7/packages/A7 Unit 6 - Relationships in Triangles/Lessons/6.06/A7 6.06 Real-World Coordinate-Plane Problems; Perimeter - Slides.pptx
@@ -3702,7 +3702,7 @@
       </p:sp>
       <p:pic>
         <p:nvPicPr>
-          <p:cNvPr id="9" name="Picture 8" descr="f7637bf1f23e2bd1.png"/>
+          <p:cNvPr id="9" name="Picture 8" descr="db67e819f9f41b7b.png"/>
           <p:cNvPicPr>
             <a:picLocks noChangeAspect="1"/>
           </p:cNvPicPr>
@@ -3716,8 +3716,8 @@
         </p:blipFill>
         <p:spPr>
           <a:xfrm>
-            <a:off x="4030442" y="2238929"/>
-            <a:ext cx="1173861" cy="279844"/>
+            <a:off x="4145599" y="2238929"/>
+            <a:ext cx="1057465" cy="279844"/>
           </a:xfrm>
           <a:prstGeom prst="rect">
             <a:avLst/>
@@ -3732,7 +3732,7 @@
         </p:nvSpPr>
         <p:spPr>
           <a:xfrm>
-            <a:off x="5204303" y="2116438"/>
+            <a:off x="5203064" y="2116438"/>
             <a:ext cx="378166" cy="457200"/>
           </a:xfrm>
           <a:prstGeom prst="rect">
@@ -3761,7 +3761,7 @@
       </p:sp>
       <p:pic>
         <p:nvPicPr>
-          <p:cNvPr id="11" name="Picture 10" descr="4c53dc4ab84ceb89.png"/>
+          <p:cNvPr id="11" name="Picture 10" descr="12e3ad8100f4a2fd.png"/>
           <p:cNvPicPr>
             <a:picLocks noChangeAspect="1"/>
           </p:cNvPicPr>
@@ -3775,8 +3775,8 @@
         </p:blipFill>
         <p:spPr>
           <a:xfrm>
-            <a:off x="5445309" y="2238929"/>
-            <a:ext cx="1007935" cy="279844"/>
+            <a:off x="5444071" y="2238929"/>
+            <a:ext cx="894016" cy="279844"/>
           </a:xfrm>
           <a:prstGeom prst="rect">
             <a:avLst/>
@@ -3791,7 +3791,7 @@
         </p:nvSpPr>
         <p:spPr>
           <a:xfrm>
-            <a:off x="6453244" y="2116438"/>
+            <a:off x="6338087" y="2116438"/>
             <a:ext cx="953666" cy="457200"/>
           </a:xfrm>
           <a:prstGeom prst="rect">
@@ -3834,7 +3834,7 @@
         </p:blipFill>
         <p:spPr>
           <a:xfrm>
-            <a:off x="7269751" y="2238929"/>
+            <a:off x="7154594" y="2238929"/>
             <a:ext cx="718185" cy="279844"/>
           </a:xfrm>
           <a:prstGeom prst="rect">
@@ -3850,7 +3850,7 @@
         </p:nvSpPr>
         <p:spPr>
           <a:xfrm>
-            <a:off x="7987936" y="2116438"/>
+            <a:off x="7872779" y="2116438"/>
             <a:ext cx="280301" cy="457200"/>
           </a:xfrm>
           <a:prstGeom prst="rect">
@@ -4142,7 +4142,7 @@
       </p:sp>
       <p:pic>
         <p:nvPicPr>
-          <p:cNvPr id="9" name="Picture 8" descr="0885c1628ecce207.png"/>
+          <p:cNvPr id="9" name="Picture 8" descr="4f803786a8d17855.png"/>
           <p:cNvPicPr>
             <a:picLocks noChangeAspect="1"/>
           </p:cNvPicPr>
@@ -4156,8 +4156,8 @@
         </p:blipFill>
         <p:spPr>
           <a:xfrm>
-            <a:off x="4026727" y="2236453"/>
-            <a:ext cx="1176337" cy="282321"/>
+            <a:off x="4141884" y="2236453"/>
+            <a:ext cx="1059942" cy="282321"/>
           </a:xfrm>
           <a:prstGeom prst="rect">
             <a:avLst/>
@@ -4172,7 +4172,7 @@
         </p:nvSpPr>
         <p:spPr>
           <a:xfrm>
-            <a:off x="5203064" y="2116438"/>
+            <a:off x="5201826" y="2116438"/>
             <a:ext cx="378166" cy="457200"/>
           </a:xfrm>
           <a:prstGeom prst="rect">
@@ -4201,7 +4201,7 @@
       </p:sp>
       <p:pic>
         <p:nvPicPr>
-          <p:cNvPr id="11" name="Picture 10" descr="e1561ae894e4e313.png"/>
+          <p:cNvPr id="11" name="Picture 10" descr="240347752cc7e829.png"/>
           <p:cNvPicPr>
             <a:picLocks noChangeAspect="1"/>
           </p:cNvPicPr>
@@ -4215,8 +4215,8 @@
         </p:blipFill>
         <p:spPr>
           <a:xfrm>
-            <a:off x="5444071" y="2236453"/>
-            <a:ext cx="1010412" cy="282321"/>
+            <a:off x="5442832" y="2236453"/>
+            <a:ext cx="896493" cy="282321"/>
           </a:xfrm>
           <a:prstGeom prst="rect">
             <a:avLst/>
@@ -4231,7 +4231,7 @@
         </p:nvSpPr>
         <p:spPr>
           <a:xfrm>
-            <a:off x="6454483" y="2116438"/>
+            <a:off x="6339325" y="2116438"/>
             <a:ext cx="953666" cy="457200"/>
           </a:xfrm>
           <a:prstGeom prst="rect">
@@ -4274,7 +4274,7 @@
         </p:blipFill>
         <p:spPr>
           <a:xfrm>
-            <a:off x="7270989" y="2236453"/>
+            <a:off x="7155832" y="2236453"/>
             <a:ext cx="720661" cy="282321"/>
           </a:xfrm>
           <a:prstGeom prst="rect">
@@ -4290,7 +4290,7 @@
         </p:nvSpPr>
         <p:spPr>
           <a:xfrm>
-            <a:off x="7991651" y="2116438"/>
+            <a:off x="7876494" y="2116438"/>
             <a:ext cx="280301" cy="457200"/>
           </a:xfrm>
           <a:prstGeom prst="rect">
@@ -4813,7 +4813,7 @@
         </p:nvSpPr>
         <p:spPr>
           <a:xfrm>
-            <a:off x="2130298" y="1591967"/>
+            <a:off x="2188496" y="1591967"/>
             <a:ext cx="6874128" cy="457200"/>
           </a:xfrm>
           <a:prstGeom prst="rect">
@@ -4842,7 +4842,7 @@
       </p:sp>
       <p:pic>
         <p:nvPicPr>
-          <p:cNvPr id="9" name="Picture 8" descr="7d14c651bb5002b2.png"/>
+          <p:cNvPr id="9" name="Picture 8" descr="88254de881d2bfac.png"/>
           <p:cNvPicPr>
             <a:picLocks noChangeAspect="1"/>
           </p:cNvPicPr>
@@ -4856,8 +4856,8 @@
         </p:blipFill>
         <p:spPr>
           <a:xfrm>
-            <a:off x="8867266" y="1711982"/>
-            <a:ext cx="1163955" cy="282321"/>
+            <a:off x="8925464" y="1711982"/>
+            <a:ext cx="1047559" cy="282321"/>
           </a:xfrm>
           <a:prstGeom prst="rect">
             <a:avLst/>
@@ -5647,7 +5647,7 @@
         </p:nvSpPr>
         <p:spPr>
           <a:xfrm>
-            <a:off x="1870258" y="2263140"/>
+            <a:off x="1927218" y="2263140"/>
             <a:ext cx="2603984" cy="457200"/>
           </a:xfrm>
           <a:prstGeom prst="rect">
@@ -5676,7 +5676,7 @@
       </p:sp>
       <p:pic>
         <p:nvPicPr>
-          <p:cNvPr id="11" name="Picture 10" descr="ee337b7924af3044.png"/>
+          <p:cNvPr id="11" name="Picture 10" descr="1f008430d4b708f8.png"/>
           <p:cNvPicPr>
             <a:picLocks noChangeAspect="1"/>
           </p:cNvPicPr>
@@ -5690,8 +5690,8 @@
         </p:blipFill>
         <p:spPr>
           <a:xfrm>
-            <a:off x="4337083" y="2383155"/>
-            <a:ext cx="1191196" cy="282321"/>
+            <a:off x="4394042" y="2383155"/>
+            <a:ext cx="1077277" cy="282321"/>
           </a:xfrm>
           <a:prstGeom prst="rect">
             <a:avLst/>
@@ -5706,7 +5706,7 @@
         </p:nvSpPr>
         <p:spPr>
           <a:xfrm>
-            <a:off x="5528279" y="2263140"/>
+            <a:off x="5471320" y="2263140"/>
             <a:ext cx="4900141" cy="457200"/>
           </a:xfrm>
           <a:prstGeom prst="rect">
@@ -6063,7 +6063,7 @@
         </p:nvSpPr>
         <p:spPr>
           <a:xfrm>
-            <a:off x="1869020" y="2263140"/>
+            <a:off x="1925980" y="2263140"/>
             <a:ext cx="2603984" cy="457200"/>
           </a:xfrm>
           <a:prstGeom prst="rect">
@@ -6092,7 +6092,7 @@
       </p:sp>
       <p:pic>
         <p:nvPicPr>
-          <p:cNvPr id="11" name="Picture 10" descr="eeb24940e898cdf8.png"/>
+          <p:cNvPr id="11" name="Picture 10" descr="000ce6e896ac28fc.png"/>
           <p:cNvPicPr>
             <a:picLocks noChangeAspect="1"/>
           </p:cNvPicPr>
@@ -6106,8 +6106,8 @@
         </p:blipFill>
         <p:spPr>
           <a:xfrm>
-            <a:off x="4335844" y="2380678"/>
-            <a:ext cx="1193673" cy="284797"/>
+            <a:off x="4392804" y="2380678"/>
+            <a:ext cx="1079754" cy="284797"/>
           </a:xfrm>
           <a:prstGeom prst="rect">
             <a:avLst/>
@@ -6122,7 +6122,7 @@
         </p:nvSpPr>
         <p:spPr>
           <a:xfrm>
-            <a:off x="5529517" y="2263140"/>
+            <a:off x="5472558" y="2263140"/>
             <a:ext cx="4900141" cy="457200"/>
           </a:xfrm>
           <a:prstGeom prst="rect">
@@ -6779,7 +6779,7 @@
       </p:sp>
       <p:pic>
         <p:nvPicPr>
-          <p:cNvPr id="9" name="Picture 8" descr="20651465751a1a2b.png"/>
+          <p:cNvPr id="9" name="Picture 8" descr="e0d0db1d29ad274e.png"/>
           <p:cNvPicPr>
             <a:picLocks noChangeAspect="1"/>
           </p:cNvPicPr>
@@ -6794,7 +6794,7 @@
         <p:spPr>
           <a:xfrm>
             <a:off x="5114737" y="1969198"/>
-            <a:ext cx="1396745" cy="284797"/>
+            <a:ext cx="1280350" cy="284797"/>
           </a:xfrm>
           <a:prstGeom prst="rect">
             <a:avLst/>
@@ -6809,7 +6809,7 @@
         </p:nvSpPr>
         <p:spPr>
           <a:xfrm>
-            <a:off x="6511483" y="1851660"/>
+            <a:off x="6395088" y="1851660"/>
             <a:ext cx="378166" cy="457200"/>
           </a:xfrm>
           <a:prstGeom prst="rect">
@@ -6838,7 +6838,7 @@
       </p:sp>
       <p:pic>
         <p:nvPicPr>
-          <p:cNvPr id="11" name="Picture 10" descr="46b8c6650b1e427a.png"/>
+          <p:cNvPr id="11" name="Picture 10" descr="68758c2952ccb39e.png"/>
           <p:cNvPicPr>
             <a:picLocks noChangeAspect="1"/>
           </p:cNvPicPr>
@@ -6852,8 +6852,8 @@
         </p:blipFill>
         <p:spPr>
           <a:xfrm>
-            <a:off x="6752489" y="1969198"/>
-            <a:ext cx="1186243" cy="284797"/>
+            <a:off x="6636094" y="1969198"/>
+            <a:ext cx="1072324" cy="284797"/>
           </a:xfrm>
           <a:prstGeom prst="rect">
             <a:avLst/>
@@ -6868,7 +6868,7 @@
         </p:nvSpPr>
         <p:spPr>
           <a:xfrm>
-            <a:off x="7938733" y="1851660"/>
+            <a:off x="7708418" y="1851660"/>
             <a:ext cx="953666" cy="457200"/>
           </a:xfrm>
           <a:prstGeom prst="rect">
@@ -6911,7 +6911,7 @@
         </p:blipFill>
         <p:spPr>
           <a:xfrm>
-            <a:off x="8755240" y="1969198"/>
+            <a:off x="8524925" y="1969198"/>
             <a:ext cx="896493" cy="284797"/>
           </a:xfrm>
           <a:prstGeom prst="rect">
@@ -6927,7 +6927,7 @@
         </p:nvSpPr>
         <p:spPr>
           <a:xfrm>
-            <a:off x="9651733" y="1851660"/>
+            <a:off x="9421418" y="1851660"/>
             <a:ext cx="280301" cy="457200"/>
           </a:xfrm>
           <a:prstGeom prst="rect">
@@ -7313,7 +7313,7 @@
       </p:sp>
       <p:pic>
         <p:nvPicPr>
-          <p:cNvPr id="9" name="Picture 8" descr="91e37486c2daf464.png"/>
+          <p:cNvPr id="9" name="Picture 8" descr="e3b86c9ea95c89a5.png"/>
           <p:cNvPicPr>
             <a:picLocks noChangeAspect="1"/>
           </p:cNvPicPr>
@@ -7328,7 +7328,7 @@
         <p:spPr>
           <a:xfrm>
             <a:off x="5114737" y="1966722"/>
-            <a:ext cx="1399222" cy="287274"/>
+            <a:ext cx="1282827" cy="287274"/>
           </a:xfrm>
           <a:prstGeom prst="rect">
             <a:avLst/>
@@ -7343,7 +7343,7 @@
         </p:nvSpPr>
         <p:spPr>
           <a:xfrm>
-            <a:off x="6513960" y="1851660"/>
+            <a:off x="6397564" y="1851660"/>
             <a:ext cx="378166" cy="457200"/>
           </a:xfrm>
           <a:prstGeom prst="rect">
@@ -7372,7 +7372,7 @@
       </p:sp>
       <p:pic>
         <p:nvPicPr>
-          <p:cNvPr id="11" name="Picture 10" descr="95d3ee67f1492f1e.png"/>
+          <p:cNvPr id="11" name="Picture 10" descr="32135da6d8c75587.png"/>
           <p:cNvPicPr>
             <a:picLocks noChangeAspect="1"/>
           </p:cNvPicPr>
@@ -7386,8 +7386,8 @@
         </p:blipFill>
         <p:spPr>
           <a:xfrm>
-            <a:off x="6754966" y="1966722"/>
-            <a:ext cx="1188720" cy="287274"/>
+            <a:off x="6638570" y="1966722"/>
+            <a:ext cx="1074801" cy="287274"/>
           </a:xfrm>
           <a:prstGeom prst="rect">
             <a:avLst/>
@@ -7402,7 +7402,7 @@
         </p:nvSpPr>
         <p:spPr>
           <a:xfrm>
-            <a:off x="7943686" y="1851660"/>
+            <a:off x="7713371" y="1851660"/>
             <a:ext cx="953666" cy="457200"/>
           </a:xfrm>
           <a:prstGeom prst="rect">
@@ -7445,7 +7445,7 @@
         </p:blipFill>
         <p:spPr>
           <a:xfrm>
-            <a:off x="8760193" y="1966722"/>
+            <a:off x="8529878" y="1966722"/>
             <a:ext cx="901446" cy="287274"/>
           </a:xfrm>
           <a:prstGeom prst="rect">
@@ -7461,7 +7461,7 @@
         </p:nvSpPr>
         <p:spPr>
           <a:xfrm>
-            <a:off x="9661639" y="1851660"/>
+            <a:off x="9431324" y="1851660"/>
             <a:ext cx="280301" cy="457200"/>
           </a:xfrm>
           <a:prstGeom prst="rect">
@@ -8037,7 +8037,7 @@
       </p:sp>
       <p:pic>
         <p:nvPicPr>
-          <p:cNvPr id="9" name="Picture 8" descr="cddc938f2754fd63.png"/>
+          <p:cNvPr id="9" name="Picture 8" descr="a97b0f10747f53d9.png"/>
           <p:cNvPicPr>
             <a:picLocks noChangeAspect="1"/>
           </p:cNvPicPr>
@@ -8052,7 +8052,7 @@
         <p:spPr>
           <a:xfrm>
             <a:off x="4656785" y="1974151"/>
-            <a:ext cx="1186243" cy="279844"/>
+            <a:ext cx="1069848" cy="279844"/>
           </a:xfrm>
           <a:prstGeom prst="rect">
             <a:avLst/>
@@ -8067,7 +8067,7 @@
         </p:nvSpPr>
         <p:spPr>
           <a:xfrm>
-            <a:off x="5843028" y="1851660"/>
+            <a:off x="5726633" y="1851660"/>
             <a:ext cx="378166" cy="457200"/>
           </a:xfrm>
           <a:prstGeom prst="rect">
@@ -8096,7 +8096,7 @@
       </p:sp>
       <p:pic>
         <p:nvPicPr>
-          <p:cNvPr id="11" name="Picture 10" descr="114f1e4fdf285813.png"/>
+          <p:cNvPr id="11" name="Picture 10" descr="9a6c540b81771a02.png"/>
           <p:cNvPicPr>
             <a:picLocks noChangeAspect="1"/>
           </p:cNvPicPr>
@@ -8110,8 +8110,8 @@
         </p:blipFill>
         <p:spPr>
           <a:xfrm>
-            <a:off x="6084034" y="1971675"/>
-            <a:ext cx="995553" cy="282321"/>
+            <a:off x="5967639" y="1971675"/>
+            <a:ext cx="879157" cy="282321"/>
           </a:xfrm>
           <a:prstGeom prst="rect">
             <a:avLst/>
@@ -8126,7 +8126,7 @@
         </p:nvSpPr>
         <p:spPr>
           <a:xfrm>
-            <a:off x="7079587" y="1851660"/>
+            <a:off x="6846796" y="1851660"/>
             <a:ext cx="953666" cy="457200"/>
           </a:xfrm>
           <a:prstGeom prst="rect">
@@ -8169,7 +8169,7 @@
         </p:blipFill>
         <p:spPr>
           <a:xfrm>
-            <a:off x="7896094" y="1971675"/>
+            <a:off x="7663303" y="1971675"/>
             <a:ext cx="681037" cy="282321"/>
           </a:xfrm>
           <a:prstGeom prst="rect">
@@ -8185,7 +8185,7 @@
         </p:nvSpPr>
         <p:spPr>
           <a:xfrm>
-            <a:off x="8577132" y="1851660"/>
+            <a:off x="8344341" y="1851660"/>
             <a:ext cx="280301" cy="457200"/>
           </a:xfrm>
           <a:prstGeom prst="rect">
@@ -8547,7 +8547,7 @@
       </p:sp>
       <p:pic>
         <p:nvPicPr>
-          <p:cNvPr id="9" name="Picture 8" descr="766d9171f27c1611.png"/>
+          <p:cNvPr id="9" name="Picture 8" descr="1655e9e4782e577c.png"/>
           <p:cNvPicPr>
             <a:picLocks noChangeAspect="1"/>
           </p:cNvPicPr>
@@ -8562,7 +8562,7 @@
         <p:spPr>
           <a:xfrm>
             <a:off x="4656785" y="1971675"/>
-            <a:ext cx="1188720" cy="282321"/>
+            <a:ext cx="1072324" cy="282321"/>
           </a:xfrm>
           <a:prstGeom prst="rect">
             <a:avLst/>
@@ -8577,7 +8577,7 @@
         </p:nvSpPr>
         <p:spPr>
           <a:xfrm>
-            <a:off x="5845505" y="1851660"/>
+            <a:off x="5729109" y="1851660"/>
             <a:ext cx="378166" cy="457200"/>
           </a:xfrm>
           <a:prstGeom prst="rect">
@@ -8606,7 +8606,7 @@
       </p:sp>
       <p:pic>
         <p:nvPicPr>
-          <p:cNvPr id="11" name="Picture 10" descr="561bb298a85baccf.png"/>
+          <p:cNvPr id="11" name="Picture 10" descr="b732eb947b175a82.png"/>
           <p:cNvPicPr>
             <a:picLocks noChangeAspect="1"/>
           </p:cNvPicPr>
@@ -8620,8 +8620,8 @@
         </p:blipFill>
         <p:spPr>
           <a:xfrm>
-            <a:off x="6086511" y="1969198"/>
-            <a:ext cx="998029" cy="284797"/>
+            <a:off x="5970115" y="1969198"/>
+            <a:ext cx="881634" cy="284797"/>
           </a:xfrm>
           <a:prstGeom prst="rect">
             <a:avLst/>
@@ -8636,7 +8636,7 @@
         </p:nvSpPr>
         <p:spPr>
           <a:xfrm>
-            <a:off x="7084540" y="1851660"/>
+            <a:off x="6851749" y="1851660"/>
             <a:ext cx="953666" cy="457200"/>
           </a:xfrm>
           <a:prstGeom prst="rect">
@@ -8679,7 +8679,7 @@
         </p:blipFill>
         <p:spPr>
           <a:xfrm>
-            <a:off x="7901047" y="1969198"/>
+            <a:off x="7668256" y="1969198"/>
             <a:ext cx="683514" cy="284797"/>
           </a:xfrm>
           <a:prstGeom prst="rect">
@@ -8695,7 +8695,7 @@
         </p:nvSpPr>
         <p:spPr>
           <a:xfrm>
-            <a:off x="8584561" y="1851660"/>
+            <a:off x="8351770" y="1851660"/>
             <a:ext cx="280301" cy="457200"/>
           </a:xfrm>
           <a:prstGeom prst="rect">
@@ -9247,7 +9247,7 @@
       </p:sp>
       <p:pic>
         <p:nvPicPr>
-          <p:cNvPr id="9" name="Picture 8" descr="1e5bf0a274377f6a.png"/>
+          <p:cNvPr id="9" name="Picture 8" descr="d0d844374dd4e33b.png"/>
           <p:cNvPicPr>
             <a:picLocks noChangeAspect="1"/>
           </p:cNvPicPr>
@@ -9262,7 +9262,7 @@
         <p:spPr>
           <a:xfrm>
             <a:off x="5052976" y="1564719"/>
-            <a:ext cx="1115456" cy="270557"/>
+            <a:ext cx="1003911" cy="270557"/>
           </a:xfrm>
           <a:prstGeom prst="rect">
             <a:avLst/>
@@ -9277,7 +9277,7 @@
         </p:nvSpPr>
         <p:spPr>
           <a:xfrm>
-            <a:off x="6168433" y="1440180"/>
+            <a:off x="6056887" y="1440180"/>
             <a:ext cx="922743" cy="457200"/>
           </a:xfrm>
           <a:prstGeom prst="rect">
@@ -9320,7 +9320,7 @@
         </p:blipFill>
         <p:spPr>
           <a:xfrm>
-            <a:off x="6954017" y="1567092"/>
+            <a:off x="6842471" y="1567092"/>
             <a:ext cx="688260" cy="268184"/>
           </a:xfrm>
           <a:prstGeom prst="rect">
@@ -9336,7 +9336,7 @@
         </p:nvSpPr>
         <p:spPr>
           <a:xfrm>
-            <a:off x="7642277" y="1440180"/>
+            <a:off x="7530732" y="1440180"/>
             <a:ext cx="360631" cy="457200"/>
           </a:xfrm>
           <a:prstGeom prst="rect">
@@ -9588,7 +9588,7 @@
       </p:sp>
       <p:pic>
         <p:nvPicPr>
-          <p:cNvPr id="20" name="Picture 19" descr="ea0772b8c1a162f5.png"/>
+          <p:cNvPr id="20" name="Picture 19" descr="3e7ed357695194c6.png"/>
           <p:cNvPicPr>
             <a:picLocks noChangeAspect="1"/>
           </p:cNvPicPr>
@@ -9603,7 +9603,7 @@
         <p:spPr>
           <a:xfrm>
             <a:off x="6456627" y="3402663"/>
-            <a:ext cx="954071" cy="270557"/>
+            <a:ext cx="842525" cy="270557"/>
           </a:xfrm>
           <a:prstGeom prst="rect">
             <a:avLst/>
@@ -9618,7 +9618,7 @@
         </p:nvSpPr>
         <p:spPr>
           <a:xfrm>
-            <a:off x="7410698" y="3278124"/>
+            <a:off x="7299153" y="3278124"/>
             <a:ext cx="371222" cy="457200"/>
           </a:xfrm>
           <a:prstGeom prst="rect">
@@ -9647,7 +9647,7 @@
       </p:sp>
       <p:pic>
         <p:nvPicPr>
-          <p:cNvPr id="22" name="Picture 21" descr="3a95cfae893827a3.png"/>
+          <p:cNvPr id="22" name="Picture 21" descr="f481fc1d2fe87082.png"/>
           <p:cNvPicPr>
             <a:picLocks noChangeAspect="1"/>
           </p:cNvPicPr>
@@ -9661,8 +9661,8 @@
         </p:blipFill>
         <p:spPr>
           <a:xfrm>
-            <a:off x="7644761" y="3402663"/>
-            <a:ext cx="1101217" cy="270557"/>
+            <a:off x="7533215" y="3402663"/>
+            <a:ext cx="989671" cy="270557"/>
           </a:xfrm>
           <a:prstGeom prst="rect">
             <a:avLst/>
@@ -9677,7 +9677,7 @@
         </p:nvSpPr>
         <p:spPr>
           <a:xfrm>
-            <a:off x="8745978" y="3278124"/>
+            <a:off x="8522886" y="3278124"/>
             <a:ext cx="2337865" cy="457200"/>
           </a:xfrm>
           <a:prstGeom prst="rect">
@@ -9969,7 +9969,7 @@
       </p:sp>
       <p:pic>
         <p:nvPicPr>
-          <p:cNvPr id="9" name="Picture 8" descr="d832b4bac9153362.png"/>
+          <p:cNvPr id="9" name="Picture 8" descr="73f75574cb7fd7b5.png"/>
           <p:cNvPicPr>
             <a:picLocks noChangeAspect="1"/>
           </p:cNvPicPr>
@@ -9984,7 +9984,7 @@
         <p:spPr>
           <a:xfrm>
             <a:off x="2590828" y="1969198"/>
-            <a:ext cx="1419034" cy="284797"/>
+            <a:ext cx="1305115" cy="284797"/>
           </a:xfrm>
           <a:prstGeom prst="rect">
             <a:avLst/>
@@ -9999,7 +9999,7 @@
         </p:nvSpPr>
         <p:spPr>
           <a:xfrm>
-            <a:off x="4009862" y="1851660"/>
+            <a:off x="3895943" y="1851660"/>
             <a:ext cx="378166" cy="457200"/>
           </a:xfrm>
           <a:prstGeom prst="rect">
@@ -10028,7 +10028,7 @@
       </p:sp>
       <p:pic>
         <p:nvPicPr>
-          <p:cNvPr id="11" name="Picture 10" descr="973c6edcb7dba718.png"/>
+          <p:cNvPr id="11" name="Picture 10" descr="1a9c39dd178fb721.png"/>
           <p:cNvPicPr>
             <a:picLocks noChangeAspect="1"/>
           </p:cNvPicPr>
@@ -10042,8 +10042,8 @@
         </p:blipFill>
         <p:spPr>
           <a:xfrm>
-            <a:off x="4250869" y="1969198"/>
-            <a:ext cx="1362075" cy="284797"/>
+            <a:off x="4136950" y="1969198"/>
+            <a:ext cx="1245679" cy="284797"/>
           </a:xfrm>
           <a:prstGeom prst="rect">
             <a:avLst/>
@@ -10058,7 +10058,7 @@
         </p:nvSpPr>
         <p:spPr>
           <a:xfrm>
-            <a:off x="5612944" y="1851660"/>
+            <a:off x="5382629" y="1851660"/>
             <a:ext cx="378166" cy="457200"/>
           </a:xfrm>
           <a:prstGeom prst="rect">
@@ -10101,7 +10101,7 @@
         </p:blipFill>
         <p:spPr>
           <a:xfrm>
-            <a:off x="5853950" y="1969198"/>
+            <a:off x="5623635" y="1969198"/>
             <a:ext cx="889063" cy="284797"/>
           </a:xfrm>
           <a:prstGeom prst="rect">
@@ -10117,7 +10117,7 @@
         </p:nvSpPr>
         <p:spPr>
           <a:xfrm>
-            <a:off x="6743013" y="1851660"/>
+            <a:off x="6512699" y="1851660"/>
             <a:ext cx="3057990" cy="457200"/>
           </a:xfrm>
           <a:prstGeom prst="rect">
@@ -10503,7 +10503,7 @@
       </p:sp>
       <p:pic>
         <p:nvPicPr>
-          <p:cNvPr id="9" name="Picture 8" descr="a9da81e531be712e.png"/>
+          <p:cNvPr id="9" name="Picture 8" descr="e5fb5ae81ad866c7.png"/>
           <p:cNvPicPr>
             <a:picLocks noChangeAspect="1"/>
           </p:cNvPicPr>
@@ -10518,7 +10518,7 @@
         <p:spPr>
           <a:xfrm>
             <a:off x="2590828" y="1966722"/>
-            <a:ext cx="1421511" cy="287274"/>
+            <a:ext cx="1307592" cy="287274"/>
           </a:xfrm>
           <a:prstGeom prst="rect">
             <a:avLst/>
@@ -10533,7 +10533,7 @@
         </p:nvSpPr>
         <p:spPr>
           <a:xfrm>
-            <a:off x="4012339" y="1851660"/>
+            <a:off x="3898420" y="1851660"/>
             <a:ext cx="378166" cy="457200"/>
           </a:xfrm>
           <a:prstGeom prst="rect">
@@ -10562,7 +10562,7 @@
       </p:sp>
       <p:pic>
         <p:nvPicPr>
-          <p:cNvPr id="11" name="Picture 10" descr="66c2f1763edcf22d.png"/>
+          <p:cNvPr id="11" name="Picture 10" descr="2940cccf337b19d7.png"/>
           <p:cNvPicPr>
             <a:picLocks noChangeAspect="1"/>
           </p:cNvPicPr>
@@ -10576,8 +10576,8 @@
         </p:blipFill>
         <p:spPr>
           <a:xfrm>
-            <a:off x="4253345" y="1966722"/>
-            <a:ext cx="1364551" cy="287274"/>
+            <a:off x="4139426" y="1966722"/>
+            <a:ext cx="1248156" cy="287274"/>
           </a:xfrm>
           <a:prstGeom prst="rect">
             <a:avLst/>
@@ -10592,7 +10592,7 @@
         </p:nvSpPr>
         <p:spPr>
           <a:xfrm>
-            <a:off x="5617897" y="1851660"/>
+            <a:off x="5387582" y="1851660"/>
             <a:ext cx="378166" cy="457200"/>
           </a:xfrm>
           <a:prstGeom prst="rect">
@@ -10635,7 +10635,7 @@
         </p:blipFill>
         <p:spPr>
           <a:xfrm>
-            <a:off x="5858903" y="1966722"/>
+            <a:off x="5628588" y="1966722"/>
             <a:ext cx="891540" cy="287274"/>
           </a:xfrm>
           <a:prstGeom prst="rect">
@@ -10651,7 +10651,7 @@
         </p:nvSpPr>
         <p:spPr>
           <a:xfrm>
-            <a:off x="6750443" y="1851660"/>
+            <a:off x="6520128" y="1851660"/>
             <a:ext cx="3057990" cy="457200"/>
           </a:xfrm>
           <a:prstGeom prst="rect">
@@ -10715,7 +10715,7 @@
       </p:sp>
       <p:pic>
         <p:nvPicPr>
-          <p:cNvPr id="16" name="Picture 15" descr="g7e2e8b59de7d12ae.png"/>
+          <p:cNvPr id="16" name="Picture 15" descr="g1596dfd5ae91f8b0.png"/>
           <p:cNvPicPr>
             <a:picLocks noChangeAspect="1"/>
           </p:cNvPicPr>
@@ -10729,7 +10729,7 @@
         </p:blipFill>
         <p:spPr>
           <a:xfrm>
-            <a:off x="2405993" y="3071986"/>
+            <a:off x="1506718" y="3071986"/>
             <a:ext cx="2508190" cy="2213245"/>
           </a:xfrm>
           <a:prstGeom prst="rect">
@@ -10745,8 +10745,8 @@
         </p:nvSpPr>
         <p:spPr>
           <a:xfrm>
-            <a:off x="5645703" y="3447089"/>
-            <a:ext cx="883028" cy="457200"/>
+            <a:off x="4746428" y="3195629"/>
+            <a:ext cx="3354533" cy="457200"/>
           </a:xfrm>
           <a:prstGeom prst="rect">
             <a:avLst/>
@@ -10767,14 +10767,14 @@
                 </a:solidFill>
                 <a:latin typeface="Lexend"/>
               </a:rPr>
-              <a:t>AC:  </a:t>
+              <a:t>the height from C to </a:t>
             </a:r>
           </a:p>
         </p:txBody>
       </p:sp>
       <p:pic>
         <p:nvPicPr>
-          <p:cNvPr id="18" name="Picture 17" descr="f99e1e60b05ca136.png"/>
+          <p:cNvPr id="18" name="Picture 17" descr="a9e697a44b5878b7.png"/>
           <p:cNvPicPr>
             <a:picLocks noChangeAspect="1"/>
           </p:cNvPicPr>
@@ -10788,8 +10788,8 @@
         </p:blipFill>
         <p:spPr>
           <a:xfrm>
-            <a:off x="6391571" y="3535671"/>
-            <a:ext cx="2310288" cy="261366"/>
+            <a:off x="7963801" y="3326216"/>
+            <a:ext cx="812101" cy="270700"/>
           </a:xfrm>
           <a:prstGeom prst="rect">
             <a:avLst/>
@@ -10804,8 +10804,8 @@
         </p:nvSpPr>
         <p:spPr>
           <a:xfrm>
-            <a:off x="8701860" y="3447089"/>
-            <a:ext cx="469437" cy="457200"/>
+            <a:off x="8775902" y="3195629"/>
+            <a:ext cx="457197" cy="457200"/>
           </a:xfrm>
           <a:prstGeom prst="rect">
             <a:avLst/>
@@ -10826,14 +10826,14 @@
                 </a:solidFill>
                 <a:latin typeface="Lexend"/>
               </a:rPr>
-              <a:t>,  </a:t>
+              <a:t>:  </a:t>
             </a:r>
           </a:p>
         </p:txBody>
       </p:sp>
       <p:pic>
         <p:nvPicPr>
-          <p:cNvPr id="20" name="Picture 19" descr="d65cbda9bdc0017c.png"/>
+          <p:cNvPr id="20" name="Picture 19" descr="d7ba9e475850f351.png"/>
           <p:cNvPicPr>
             <a:picLocks noChangeAspect="1"/>
           </p:cNvPicPr>
@@ -10847,8 +10847,8 @@
         </p:blipFill>
         <p:spPr>
           <a:xfrm>
-            <a:off x="9034137" y="3584677"/>
-            <a:ext cx="718756" cy="212359"/>
+            <a:off x="9095940" y="3326216"/>
+            <a:ext cx="1563528" cy="270700"/>
           </a:xfrm>
           <a:prstGeom prst="rect">
             <a:avLst/>
@@ -10863,8 +10863,8 @@
         </p:nvSpPr>
         <p:spPr>
           <a:xfrm>
-            <a:off x="5645703" y="3950009"/>
-            <a:ext cx="883327" cy="457200"/>
+            <a:off x="4746428" y="3698549"/>
+            <a:ext cx="883028" cy="457200"/>
           </a:xfrm>
           <a:prstGeom prst="rect">
             <a:avLst/>
@@ -10885,14 +10885,14 @@
                 </a:solidFill>
                 <a:latin typeface="Lexend"/>
               </a:rPr>
-              <a:t>BC:  </a:t>
+              <a:t>AC:  </a:t>
             </a:r>
           </a:p>
         </p:txBody>
       </p:sp>
       <p:pic>
         <p:nvPicPr>
-          <p:cNvPr id="22" name="Picture 21" descr="4d8caafc7f3b6429.png"/>
+          <p:cNvPr id="22" name="Picture 21" descr="f99e1e60b05ca136.png"/>
           <p:cNvPicPr>
             <a:picLocks noChangeAspect="1"/>
           </p:cNvPicPr>
@@ -10906,8 +10906,8 @@
         </p:blipFill>
         <p:spPr>
           <a:xfrm>
-            <a:off x="6391871" y="4038591"/>
-            <a:ext cx="2314956" cy="261366"/>
+            <a:off x="5492296" y="3787131"/>
+            <a:ext cx="2310288" cy="261366"/>
           </a:xfrm>
           <a:prstGeom prst="rect">
             <a:avLst/>
@@ -10922,7 +10922,7 @@
         </p:nvSpPr>
         <p:spPr>
           <a:xfrm>
-            <a:off x="8706827" y="3950009"/>
+            <a:off x="7802585" y="3698549"/>
             <a:ext cx="469437" cy="457200"/>
           </a:xfrm>
           <a:prstGeom prst="rect">
@@ -10951,7 +10951,7 @@
       </p:sp>
       <p:pic>
         <p:nvPicPr>
-          <p:cNvPr id="24" name="Picture 23" descr="de21a50ad46b70bb.png"/>
+          <p:cNvPr id="24" name="Picture 23" descr="d65cbda9bdc0017c.png"/>
           <p:cNvPicPr>
             <a:picLocks noChangeAspect="1"/>
           </p:cNvPicPr>
@@ -10965,17 +10965,52 @@
         </p:blipFill>
         <p:spPr>
           <a:xfrm>
-            <a:off x="9039104" y="4087597"/>
-            <a:ext cx="723423" cy="212359"/>
+            <a:off x="8134862" y="3836137"/>
+            <a:ext cx="718756" cy="212359"/>
           </a:xfrm>
           <a:prstGeom prst="rect">
             <a:avLst/>
           </a:prstGeom>
         </p:spPr>
       </p:pic>
+      <p:sp>
+        <p:nvSpPr>
+          <p:cNvPr id="25" name="TextBox 24"/>
+          <p:cNvSpPr txBox="1"/>
+          <p:nvPr/>
+        </p:nvSpPr>
+        <p:spPr>
+          <a:xfrm>
+            <a:off x="4746428" y="4201469"/>
+            <a:ext cx="883327" cy="457200"/>
+          </a:xfrm>
+          <a:prstGeom prst="rect">
+            <a:avLst/>
+          </a:prstGeom>
+          <a:noFill/>
+        </p:spPr>
+        <p:txBody>
+          <a:bodyPr wrap="none" lIns="45720" rIns="45720" tIns="18288" bIns="18288" anchor="ctr">
+            <a:noAutofit/>
+          </a:bodyPr>
+          <a:lstStyle/>
+          <a:p>
+            <a:pPr algn="l"/>
+            <a:r>
+              <a:rPr sz="2330" b="0" i="0">
+                <a:solidFill>
+                  <a:srgbClr val="1A1A1A"/>
+                </a:solidFill>
+                <a:latin typeface="Lexend"/>
+              </a:rPr>
+              <a:t>BC:  </a:t>
+            </a:r>
+          </a:p>
+        </p:txBody>
+      </p:sp>
       <p:pic>
         <p:nvPicPr>
-          <p:cNvPr id="25" name="Picture 24" descr="b5e1abcfea899eca.png"/>
+          <p:cNvPr id="26" name="Picture 25" descr="4d8caafc7f3b6429.png"/>
           <p:cNvPicPr>
             <a:picLocks noChangeAspect="1"/>
           </p:cNvPicPr>
@@ -10989,7 +11024,90 @@
         </p:blipFill>
         <p:spPr>
           <a:xfrm>
-            <a:off x="5700567" y="4587898"/>
+            <a:off x="5492596" y="4290051"/>
+            <a:ext cx="2314956" cy="261366"/>
+          </a:xfrm>
+          <a:prstGeom prst="rect">
+            <a:avLst/>
+          </a:prstGeom>
+        </p:spPr>
+      </p:pic>
+      <p:sp>
+        <p:nvSpPr>
+          <p:cNvPr id="27" name="TextBox 26"/>
+          <p:cNvSpPr txBox="1"/>
+          <p:nvPr/>
+        </p:nvSpPr>
+        <p:spPr>
+          <a:xfrm>
+            <a:off x="7807552" y="4201469"/>
+            <a:ext cx="469437" cy="457200"/>
+          </a:xfrm>
+          <a:prstGeom prst="rect">
+            <a:avLst/>
+          </a:prstGeom>
+          <a:noFill/>
+        </p:spPr>
+        <p:txBody>
+          <a:bodyPr wrap="none" lIns="45720" rIns="45720" tIns="18288" bIns="18288" anchor="ctr">
+            <a:noAutofit/>
+          </a:bodyPr>
+          <a:lstStyle/>
+          <a:p>
+            <a:pPr algn="l"/>
+            <a:r>
+              <a:rPr sz="2330" b="0" i="0">
+                <a:solidFill>
+                  <a:srgbClr val="1A1A1A"/>
+                </a:solidFill>
+                <a:latin typeface="Lexend"/>
+              </a:rPr>
+              <a:t>,  </a:t>
+            </a:r>
+          </a:p>
+        </p:txBody>
+      </p:sp>
+      <p:pic>
+        <p:nvPicPr>
+          <p:cNvPr id="28" name="Picture 27" descr="de21a50ad46b70bb.png"/>
+          <p:cNvPicPr>
+            <a:picLocks noChangeAspect="1"/>
+          </p:cNvPicPr>
+          <p:nvPr/>
+        </p:nvPicPr>
+        <p:blipFill>
+          <a:blip r:embed="rId11"/>
+          <a:stretch>
+            <a:fillRect/>
+          </a:stretch>
+        </p:blipFill>
+        <p:spPr>
+          <a:xfrm>
+            <a:off x="8139829" y="4339057"/>
+            <a:ext cx="723423" cy="212359"/>
+          </a:xfrm>
+          <a:prstGeom prst="rect">
+            <a:avLst/>
+          </a:prstGeom>
+        </p:spPr>
+      </p:pic>
+      <p:pic>
+        <p:nvPicPr>
+          <p:cNvPr id="29" name="Picture 28" descr="b5e1abcfea899eca.png"/>
+          <p:cNvPicPr>
+            <a:picLocks noChangeAspect="1"/>
+          </p:cNvPicPr>
+          <p:nvPr/>
+        </p:nvPicPr>
+        <p:blipFill>
+          <a:blip r:embed="rId12"/>
+          <a:stretch>
+            <a:fillRect/>
+          </a:stretch>
+        </p:blipFill>
+        <p:spPr>
+          <a:xfrm>
+            <a:off x="4801292" y="4839358"/>
             <a:ext cx="2566416" cy="213360"/>
           </a:xfrm>
           <a:prstGeom prst="rect">
@@ -10999,7 +11117,7 @@
       </p:pic>
       <p:sp>
         <p:nvSpPr>
-          <p:cNvPr id="26" name="TextBox 25"/>
+          <p:cNvPr id="30" name="TextBox 29"/>
           <p:cNvSpPr txBox="1"/>
           <p:nvPr/>
         </p:nvSpPr>
@@ -11415,7 +11533,7 @@
       </p:sp>
       <p:pic>
         <p:nvPicPr>
-          <p:cNvPr id="13" name="Picture 12" descr="85355efc44b8aa0d.png"/>
+          <p:cNvPr id="13" name="Picture 12" descr="e7c815d6c4c3d11f.png"/>
           <p:cNvPicPr>
             <a:picLocks noChangeAspect="1"/>
           </p:cNvPicPr>
@@ -11430,7 +11548,7 @@
         <p:spPr>
           <a:xfrm>
             <a:off x="3911631" y="2510773"/>
-            <a:ext cx="1010412" cy="282321"/>
+            <a:ext cx="894016" cy="282321"/>
           </a:xfrm>
           <a:prstGeom prst="rect">
             <a:avLst/>
@@ -11445,7 +11563,7 @@
         </p:nvSpPr>
         <p:spPr>
           <a:xfrm>
-            <a:off x="4922043" y="2390758"/>
+            <a:off x="4805648" y="2390758"/>
             <a:ext cx="3646129" cy="457200"/>
           </a:xfrm>
           <a:prstGeom prst="rect">
@@ -12066,7 +12184,7 @@
       </p:sp>
       <p:pic>
         <p:nvPicPr>
-          <p:cNvPr id="13" name="Picture 12" descr="5cac30a7325a50b2.png"/>
+          <p:cNvPr id="13" name="Picture 12" descr="22905f4670dbbc44.png"/>
           <p:cNvPicPr>
             <a:picLocks noChangeAspect="1"/>
           </p:cNvPicPr>
@@ -12081,7 +12199,7 @@
         <p:spPr>
           <a:xfrm>
             <a:off x="3916584" y="2508296"/>
-            <a:ext cx="1012888" cy="284797"/>
+            <a:ext cx="896493" cy="284797"/>
           </a:xfrm>
           <a:prstGeom prst="rect">
             <a:avLst/>
@@ -12096,7 +12214,7 @@
         </p:nvSpPr>
         <p:spPr>
           <a:xfrm>
-            <a:off x="4929473" y="2390758"/>
+            <a:off x="4813077" y="2390758"/>
             <a:ext cx="3646129" cy="457200"/>
           </a:xfrm>
           <a:prstGeom prst="rect">
@@ -12648,7 +12766,7 @@
       </p:sp>
       <p:pic>
         <p:nvPicPr>
-          <p:cNvPr id="9" name="Picture 8" descr="b381385a56012ea1.png"/>
+          <p:cNvPr id="9" name="Picture 8" descr="0f55939e83f8687c.png"/>
           <p:cNvPicPr>
             <a:picLocks noChangeAspect="1"/>
           </p:cNvPicPr>
@@ -12663,7 +12781,7 @@
         <p:spPr>
           <a:xfrm>
             <a:off x="6652452" y="1971675"/>
-            <a:ext cx="1151572" cy="282321"/>
+            <a:ext cx="1037653" cy="282321"/>
           </a:xfrm>
           <a:prstGeom prst="rect">
             <a:avLst/>
@@ -13099,7 +13217,7 @@
       </p:sp>
       <p:pic>
         <p:nvPicPr>
-          <p:cNvPr id="9" name="Picture 8" descr="59e86e97f1b20dcc.png"/>
+          <p:cNvPr id="9" name="Picture 8" descr="5829683f873a4889.png"/>
           <p:cNvPicPr>
             <a:picLocks noChangeAspect="1"/>
           </p:cNvPicPr>
@@ -13114,7 +13232,7 @@
         <p:spPr>
           <a:xfrm>
             <a:off x="6652452" y="1969198"/>
-            <a:ext cx="1154049" cy="284797"/>
+            <a:ext cx="1040130" cy="284797"/>
           </a:xfrm>
           <a:prstGeom prst="rect">
             <a:avLst/>
@@ -13751,7 +13869,7 @@
       </p:sp>
       <p:pic>
         <p:nvPicPr>
-          <p:cNvPr id="9" name="Picture 8" descr="cddc938f2754fd63.png"/>
+          <p:cNvPr id="9" name="Picture 8" descr="a97b0f10747f53d9.png"/>
           <p:cNvPicPr>
             <a:picLocks noChangeAspect="1"/>
           </p:cNvPicPr>
@@ -13766,7 +13884,7 @@
         <p:spPr>
           <a:xfrm>
             <a:off x="1234440" y="2513249"/>
-            <a:ext cx="1186243" cy="279844"/>
+            <a:ext cx="1069848" cy="279844"/>
           </a:xfrm>
           <a:prstGeom prst="rect">
             <a:avLst/>
@@ -13781,7 +13899,7 @@
         </p:nvSpPr>
         <p:spPr>
           <a:xfrm>
-            <a:off x="2420683" y="2390758"/>
+            <a:off x="2304288" y="2390758"/>
             <a:ext cx="396600" cy="457200"/>
           </a:xfrm>
           <a:prstGeom prst="rect">
@@ -13810,7 +13928,7 @@
       </p:sp>
       <p:pic>
         <p:nvPicPr>
-          <p:cNvPr id="11" name="Picture 10" descr="153b53c1ff7ca61c.png"/>
+          <p:cNvPr id="11" name="Picture 10" descr="8c58404344209b30.png"/>
           <p:cNvPicPr>
             <a:picLocks noChangeAspect="1"/>
           </p:cNvPicPr>
@@ -13824,8 +13942,8 @@
         </p:blipFill>
         <p:spPr>
           <a:xfrm>
-            <a:off x="2680123" y="2508296"/>
-            <a:ext cx="1012888" cy="284797"/>
+            <a:off x="2563728" y="2508296"/>
+            <a:ext cx="896493" cy="284797"/>
           </a:xfrm>
           <a:prstGeom prst="rect">
             <a:avLst/>
@@ -13840,7 +13958,7 @@
         </p:nvSpPr>
         <p:spPr>
           <a:xfrm>
-            <a:off x="3693012" y="2390758"/>
+            <a:off x="3460221" y="2390758"/>
             <a:ext cx="396600" cy="457200"/>
           </a:xfrm>
           <a:prstGeom prst="rect">
@@ -13883,7 +14001,7 @@
         </p:blipFill>
         <p:spPr>
           <a:xfrm>
-            <a:off x="3952452" y="2508296"/>
+            <a:off x="3719661" y="2508296"/>
             <a:ext cx="703326" cy="284797"/>
           </a:xfrm>
           <a:prstGeom prst="rect">
@@ -13899,7 +14017,7 @@
         </p:nvSpPr>
         <p:spPr>
           <a:xfrm>
-            <a:off x="4655778" y="2390758"/>
+            <a:off x="4422987" y="2390758"/>
             <a:ext cx="1004622" cy="457200"/>
           </a:xfrm>
           <a:prstGeom prst="rect">
@@ -13942,7 +14060,7 @@
         </p:blipFill>
         <p:spPr>
           <a:xfrm>
-            <a:off x="5523241" y="2513249"/>
+            <a:off x="5290450" y="2513249"/>
             <a:ext cx="876681" cy="279844"/>
           </a:xfrm>
           <a:prstGeom prst="rect">
@@ -13958,7 +14076,7 @@
         </p:nvSpPr>
         <p:spPr>
           <a:xfrm>
-            <a:off x="6399922" y="2390758"/>
+            <a:off x="6167131" y="2390758"/>
             <a:ext cx="374819" cy="457200"/>
           </a:xfrm>
           <a:prstGeom prst="rect">
@@ -14461,7 +14579,7 @@
       </p:sp>
       <p:pic>
         <p:nvPicPr>
-          <p:cNvPr id="9" name="Picture 8" descr="766d9171f27c1611.png"/>
+          <p:cNvPr id="9" name="Picture 8" descr="1655e9e4782e577c.png"/>
           <p:cNvPicPr>
             <a:picLocks noChangeAspect="1"/>
           </p:cNvPicPr>
@@ -14476,7 +14594,7 @@
         <p:spPr>
           <a:xfrm>
             <a:off x="1234440" y="2510773"/>
-            <a:ext cx="1188720" cy="282321"/>
+            <a:ext cx="1072324" cy="282321"/>
           </a:xfrm>
           <a:prstGeom prst="rect">
             <a:avLst/>
@@ -14491,7 +14609,7 @@
         </p:nvSpPr>
         <p:spPr>
           <a:xfrm>
-            <a:off x="2423160" y="2390758"/>
+            <a:off x="2306764" y="2390758"/>
             <a:ext cx="396600" cy="457200"/>
           </a:xfrm>
           <a:prstGeom prst="rect">
@@ -14520,7 +14638,7 @@
       </p:sp>
       <p:pic>
         <p:nvPicPr>
-          <p:cNvPr id="11" name="Picture 10" descr="6abbcd38a0851523.png"/>
+          <p:cNvPr id="11" name="Picture 10" descr="4a9d5ba6f1da890c.png"/>
           <p:cNvPicPr>
             <a:picLocks noChangeAspect="1"/>
           </p:cNvPicPr>
@@ -14534,8 +14652,8 @@
         </p:blipFill>
         <p:spPr>
           <a:xfrm>
-            <a:off x="2682600" y="2505820"/>
-            <a:ext cx="1015365" cy="287274"/>
+            <a:off x="2566204" y="2505820"/>
+            <a:ext cx="898969" cy="287274"/>
           </a:xfrm>
           <a:prstGeom prst="rect">
             <a:avLst/>
@@ -14550,7 +14668,7 @@
         </p:nvSpPr>
         <p:spPr>
           <a:xfrm>
-            <a:off x="3697965" y="2390758"/>
+            <a:off x="3465174" y="2390758"/>
             <a:ext cx="396600" cy="457200"/>
           </a:xfrm>
           <a:prstGeom prst="rect">
@@ -14593,7 +14711,7 @@
         </p:blipFill>
         <p:spPr>
           <a:xfrm>
-            <a:off x="3957405" y="2505820"/>
+            <a:off x="3724614" y="2505820"/>
             <a:ext cx="705802" cy="287274"/>
           </a:xfrm>
           <a:prstGeom prst="rect">
@@ -14609,7 +14727,7 @@
         </p:nvSpPr>
         <p:spPr>
           <a:xfrm>
-            <a:off x="4663208" y="2390758"/>
+            <a:off x="4430417" y="2390758"/>
             <a:ext cx="1004622" cy="457200"/>
           </a:xfrm>
           <a:prstGeom prst="rect">
@@ -14652,7 +14770,7 @@
         </p:blipFill>
         <p:spPr>
           <a:xfrm>
-            <a:off x="5530670" y="2510773"/>
+            <a:off x="5297879" y="2510773"/>
             <a:ext cx="879157" cy="282321"/>
           </a:xfrm>
           <a:prstGeom prst="rect">
@@ -14668,7 +14786,7 @@
         </p:nvSpPr>
         <p:spPr>
           <a:xfrm>
-            <a:off x="6409828" y="2390758"/>
+            <a:off x="6177037" y="2390758"/>
             <a:ext cx="374819" cy="457200"/>
           </a:xfrm>
           <a:prstGeom prst="rect">
@@ -15255,7 +15373,7 @@
       </p:sp>
       <p:pic>
         <p:nvPicPr>
-          <p:cNvPr id="11" name="Picture 10" descr="eba37c76e917a3c0.png"/>
+          <p:cNvPr id="11" name="Picture 10" descr="51bb3a4fad71cd75.png"/>
           <p:cNvPicPr>
             <a:picLocks noChangeAspect="1"/>
           </p:cNvPicPr>
@@ -15270,7 +15388,7 @@
         <p:spPr>
           <a:xfrm>
             <a:off x="3704861" y="2586799"/>
-            <a:ext cx="1005459" cy="279844"/>
+            <a:ext cx="889063" cy="279844"/>
           </a:xfrm>
           <a:prstGeom prst="rect">
             <a:avLst/>
@@ -15285,7 +15403,7 @@
         </p:nvSpPr>
         <p:spPr>
           <a:xfrm>
-            <a:off x="4710320" y="2464308"/>
+            <a:off x="4593924" y="2464308"/>
             <a:ext cx="280301" cy="457200"/>
           </a:xfrm>
           <a:prstGeom prst="rect">
@@ -15706,7 +15824,7 @@
       </p:sp>
       <p:pic>
         <p:nvPicPr>
-          <p:cNvPr id="11" name="Picture 10" descr="de7e15c7b8d74add.png"/>
+          <p:cNvPr id="11" name="Picture 10" descr="18162535f5be7648.png"/>
           <p:cNvPicPr>
             <a:picLocks noChangeAspect="1"/>
           </p:cNvPicPr>
@@ -15721,7 +15839,7 @@
         <p:spPr>
           <a:xfrm>
             <a:off x="3704861" y="2584323"/>
-            <a:ext cx="1007935" cy="282321"/>
+            <a:ext cx="891540" cy="282321"/>
           </a:xfrm>
           <a:prstGeom prst="rect">
             <a:avLst/>
@@ -15736,7 +15854,7 @@
         </p:nvSpPr>
         <p:spPr>
           <a:xfrm>
-            <a:off x="4712796" y="2464308"/>
+            <a:off x="4596401" y="2464308"/>
             <a:ext cx="280301" cy="457200"/>
           </a:xfrm>
           <a:prstGeom prst="rect">
@@ -16299,7 +16417,7 @@
       </p:sp>
       <p:pic>
         <p:nvPicPr>
-          <p:cNvPr id="9" name="Picture 8" descr="1e5bf0a274377f6a.png"/>
+          <p:cNvPr id="9" name="Picture 8" descr="d0d844374dd4e33b.png"/>
           <p:cNvPicPr>
             <a:picLocks noChangeAspect="1"/>
           </p:cNvPicPr>
@@ -16314,7 +16432,7 @@
         <p:spPr>
           <a:xfrm>
             <a:off x="5052976" y="1564719"/>
-            <a:ext cx="1115456" cy="270557"/>
+            <a:ext cx="1003911" cy="270557"/>
           </a:xfrm>
           <a:prstGeom prst="rect">
             <a:avLst/>
@@ -16329,7 +16447,7 @@
         </p:nvSpPr>
         <p:spPr>
           <a:xfrm>
-            <a:off x="6168433" y="1440180"/>
+            <a:off x="6056887" y="1440180"/>
             <a:ext cx="922743" cy="457200"/>
           </a:xfrm>
           <a:prstGeom prst="rect">
@@ -16372,7 +16490,7 @@
         </p:blipFill>
         <p:spPr>
           <a:xfrm>
-            <a:off x="6954017" y="1567092"/>
+            <a:off x="6842471" y="1567092"/>
             <a:ext cx="688260" cy="268184"/>
           </a:xfrm>
           <a:prstGeom prst="rect">
@@ -16388,7 +16506,7 @@
         </p:nvSpPr>
         <p:spPr>
           <a:xfrm>
-            <a:off x="7642277" y="1440180"/>
+            <a:off x="7530732" y="1440180"/>
             <a:ext cx="360631" cy="457200"/>
           </a:xfrm>
           <a:prstGeom prst="rect">
@@ -16423,7 +16541,7 @@
         </p:nvSpPr>
         <p:spPr>
           <a:xfrm>
-            <a:off x="8414389" y="1440180"/>
+            <a:off x="8302843" y="1440180"/>
             <a:ext cx="1405974" cy="457200"/>
           </a:xfrm>
           <a:prstGeom prst="rect">
@@ -16745,7 +16863,7 @@
       </p:sp>
       <p:pic>
         <p:nvPicPr>
-          <p:cNvPr id="23" name="Picture 22" descr="ea0772b8c1a162f5.png"/>
+          <p:cNvPr id="23" name="Picture 22" descr="3e7ed357695194c6.png"/>
           <p:cNvPicPr>
             <a:picLocks noChangeAspect="1"/>
           </p:cNvPicPr>
@@ -16760,7 +16878,7 @@
         <p:spPr>
           <a:xfrm>
             <a:off x="6456627" y="4317063"/>
-            <a:ext cx="954071" cy="270557"/>
+            <a:ext cx="842525" cy="270557"/>
           </a:xfrm>
           <a:prstGeom prst="rect">
             <a:avLst/>
@@ -16775,7 +16893,7 @@
         </p:nvSpPr>
         <p:spPr>
           <a:xfrm>
-            <a:off x="7410698" y="4192524"/>
+            <a:off x="7299153" y="4192524"/>
             <a:ext cx="371222" cy="457200"/>
           </a:xfrm>
           <a:prstGeom prst="rect">
@@ -16804,7 +16922,7 @@
       </p:sp>
       <p:pic>
         <p:nvPicPr>
-          <p:cNvPr id="25" name="Picture 24" descr="3a95cfae893827a3.png"/>
+          <p:cNvPr id="25" name="Picture 24" descr="f481fc1d2fe87082.png"/>
           <p:cNvPicPr>
             <a:picLocks noChangeAspect="1"/>
           </p:cNvPicPr>
@@ -16818,8 +16936,8 @@
         </p:blipFill>
         <p:spPr>
           <a:xfrm>
-            <a:off x="7644761" y="4317063"/>
-            <a:ext cx="1101217" cy="270557"/>
+            <a:off x="7533215" y="4317063"/>
+            <a:ext cx="989671" cy="270557"/>
           </a:xfrm>
           <a:prstGeom prst="rect">
             <a:avLst/>
@@ -16834,7 +16952,7 @@
         </p:nvSpPr>
         <p:spPr>
           <a:xfrm>
-            <a:off x="8745978" y="4192524"/>
+            <a:off x="8522886" y="4192524"/>
             <a:ext cx="2337865" cy="457200"/>
           </a:xfrm>
           <a:prstGeom prst="rect">
@@ -17161,7 +17279,7 @@
       </p:sp>
       <p:pic>
         <p:nvPicPr>
-          <p:cNvPr id="9" name="Picture 8" descr="890cad1d225c0e6c.png"/>
+          <p:cNvPr id="9" name="Picture 8" descr="8f59a1bbce1b0e69.png"/>
           <p:cNvPicPr>
             <a:picLocks noChangeAspect="1"/>
           </p:cNvPicPr>
@@ -17176,7 +17294,7 @@
         <p:spPr>
           <a:xfrm>
             <a:off x="7024380" y="1969198"/>
-            <a:ext cx="1166431" cy="284797"/>
+            <a:ext cx="1050036" cy="284797"/>
           </a:xfrm>
           <a:prstGeom prst="rect">
             <a:avLst/>
@@ -17191,7 +17309,7 @@
         </p:nvSpPr>
         <p:spPr>
           <a:xfrm>
-            <a:off x="8190811" y="1851660"/>
+            <a:off x="8074416" y="1851660"/>
             <a:ext cx="292240" cy="457200"/>
           </a:xfrm>
           <a:prstGeom prst="rect">
@@ -17706,7 +17824,7 @@
       </p:sp>
       <p:pic>
         <p:nvPicPr>
-          <p:cNvPr id="9" name="Picture 8" descr="5078aaa02558f3af.png"/>
+          <p:cNvPr id="9" name="Picture 8" descr="22f8e5064804e9fe.png"/>
           <p:cNvPicPr>
             <a:picLocks noChangeAspect="1"/>
           </p:cNvPicPr>
@@ -17721,7 +17839,7 @@
         <p:spPr>
           <a:xfrm>
             <a:off x="7024380" y="1966722"/>
-            <a:ext cx="1168908" cy="287274"/>
+            <a:ext cx="1052512" cy="287274"/>
           </a:xfrm>
           <a:prstGeom prst="rect">
             <a:avLst/>
@@ -17736,7 +17854,7 @@
         </p:nvSpPr>
         <p:spPr>
           <a:xfrm>
-            <a:off x="8193288" y="1851660"/>
+            <a:off x="8076892" y="1851660"/>
             <a:ext cx="292240" cy="457200"/>
           </a:xfrm>
           <a:prstGeom prst="rect">
@@ -19660,7 +19778,7 @@
       </p:sp>
       <p:pic>
         <p:nvPicPr>
-          <p:cNvPr id="10" name="Picture 9" descr="f8df7d2fbd4127b2.png"/>
+          <p:cNvPr id="10" name="Picture 9" descr="a5b6d05fd7f41ce5.png"/>
           <p:cNvPicPr>
             <a:picLocks noChangeAspect="1"/>
           </p:cNvPicPr>
@@ -19674,8 +19792,8 @@
         </p:blipFill>
         <p:spPr>
           <a:xfrm>
-            <a:off x="5624512" y="1570780"/>
-            <a:ext cx="964360" cy="234165"/>
+            <a:off x="5624512" y="1572039"/>
+            <a:ext cx="873715" cy="231647"/>
           </a:xfrm>
           <a:prstGeom prst="rect">
             <a:avLst/>
@@ -19690,7 +19808,7 @@
         </p:nvSpPr>
         <p:spPr>
           <a:xfrm>
-            <a:off x="6588873" y="1499019"/>
+            <a:off x="6498228" y="1499019"/>
             <a:ext cx="343246" cy="377686"/>
           </a:xfrm>
           <a:prstGeom prst="rect">
@@ -19719,7 +19837,7 @@
       </p:sp>
       <p:pic>
         <p:nvPicPr>
-          <p:cNvPr id="12" name="Picture 11" descr="b490da1242b960c7.png"/>
+          <p:cNvPr id="12" name="Picture 11" descr="f03a5612a3e3a0d3.png"/>
           <p:cNvPicPr>
             <a:picLocks noChangeAspect="1"/>
           </p:cNvPicPr>
@@ -19733,8 +19851,8 @@
         </p:blipFill>
         <p:spPr>
           <a:xfrm>
-            <a:off x="6794960" y="1570780"/>
-            <a:ext cx="725158" cy="234165"/>
+            <a:off x="6704315" y="1570780"/>
+            <a:ext cx="715087" cy="234165"/>
           </a:xfrm>
           <a:prstGeom prst="rect">
             <a:avLst/>
@@ -19749,7 +19867,7 @@
         </p:nvSpPr>
         <p:spPr>
           <a:xfrm>
-            <a:off x="7520119" y="1499019"/>
+            <a:off x="7419402" y="1499019"/>
             <a:ext cx="343246" cy="377686"/>
           </a:xfrm>
           <a:prstGeom prst="rect">
@@ -19778,7 +19896,7 @@
       </p:sp>
       <p:pic>
         <p:nvPicPr>
-          <p:cNvPr id="14" name="Picture 13" descr="dca74f84de6bf1e6.png"/>
+          <p:cNvPr id="14" name="Picture 13" descr="47befe413b734bd4.png"/>
           <p:cNvPicPr>
             <a:picLocks noChangeAspect="1"/>
           </p:cNvPicPr>
@@ -19792,8 +19910,8 @@
         </p:blipFill>
         <p:spPr>
           <a:xfrm>
-            <a:off x="7726205" y="1572039"/>
-            <a:ext cx="569048" cy="231647"/>
+            <a:off x="7625489" y="1570780"/>
+            <a:ext cx="715087" cy="234165"/>
           </a:xfrm>
           <a:prstGeom prst="rect">
             <a:avLst/>
@@ -19808,8 +19926,8 @@
         </p:nvSpPr>
         <p:spPr>
           <a:xfrm>
-            <a:off x="8295254" y="1499019"/>
-            <a:ext cx="265713" cy="377686"/>
+            <a:off x="8340576" y="1499019"/>
+            <a:ext cx="2797666" cy="377686"/>
           </a:xfrm>
           <a:prstGeom prst="rect">
             <a:avLst/>
@@ -19830,7 +19948,7 @@
                 </a:solidFill>
                 <a:latin typeface="Lexend"/>
               </a:rPr>
-              <a:t>.</a:t>
+              <a:t>. It has no right angle.</a:t>
             </a:r>
           </a:p>
         </p:txBody>
@@ -20025,7 +20143,7 @@
       </p:sp>
       <p:pic>
         <p:nvPicPr>
-          <p:cNvPr id="22" name="Picture 21" descr="b047226acc132207.png"/>
+          <p:cNvPr id="22" name="Picture 21" descr="3c68a2fc1886b199.png"/>
           <p:cNvPicPr>
             <a:picLocks noChangeAspect="1"/>
           </p:cNvPicPr>
@@ -20040,7 +20158,7 @@
         <p:spPr>
           <a:xfrm>
             <a:off x="7318303" y="2038714"/>
-            <a:ext cx="833429" cy="234165"/>
+            <a:ext cx="737748" cy="234165"/>
           </a:xfrm>
           <a:prstGeom prst="rect">
             <a:avLst/>
@@ -20055,7 +20173,7 @@
         </p:nvSpPr>
         <p:spPr>
           <a:xfrm>
-            <a:off x="8151733" y="1966953"/>
+            <a:off x="8056052" y="1966953"/>
             <a:ext cx="2726977" cy="377686"/>
           </a:xfrm>
           <a:prstGeom prst="rect">
@@ -20154,7 +20272,7 @@
       </p:sp>
       <p:pic>
         <p:nvPicPr>
-          <p:cNvPr id="26" name="Picture 25" descr="36f61976a2ef1ad1.png"/>
+          <p:cNvPr id="26" name="Picture 25" descr="5fb9e783455f43f9.png"/>
           <p:cNvPicPr>
             <a:picLocks noChangeAspect="1"/>
           </p:cNvPicPr>
@@ -20169,7 +20287,7 @@
         <p:spPr>
           <a:xfrm>
             <a:off x="6360024" y="2507907"/>
-            <a:ext cx="989539" cy="231647"/>
+            <a:ext cx="893859" cy="231647"/>
           </a:xfrm>
           <a:prstGeom prst="rect">
             <a:avLst/>
@@ -20184,7 +20302,7 @@
         </p:nvSpPr>
         <p:spPr>
           <a:xfrm>
-            <a:off x="7349564" y="2434888"/>
+            <a:off x="7253883" y="2434888"/>
             <a:ext cx="343246" cy="377686"/>
           </a:xfrm>
           <a:prstGeom prst="rect">
@@ -20213,7 +20331,7 @@
       </p:sp>
       <p:pic>
         <p:nvPicPr>
-          <p:cNvPr id="28" name="Picture 27" descr="e47ee9949ebce046.png"/>
+          <p:cNvPr id="28" name="Picture 27" descr="401a08bf02b2db95.png"/>
           <p:cNvPicPr>
             <a:picLocks noChangeAspect="1"/>
           </p:cNvPicPr>
@@ -20227,8 +20345,8 @@
         </p:blipFill>
         <p:spPr>
           <a:xfrm>
-            <a:off x="7555651" y="2506648"/>
-            <a:ext cx="820839" cy="234165"/>
+            <a:off x="7459970" y="2506648"/>
+            <a:ext cx="725158" cy="234165"/>
           </a:xfrm>
           <a:prstGeom prst="rect">
             <a:avLst/>
@@ -20243,7 +20361,7 @@
         </p:nvSpPr>
         <p:spPr>
           <a:xfrm>
-            <a:off x="8376490" y="2434888"/>
+            <a:off x="8185129" y="2434888"/>
             <a:ext cx="343246" cy="377686"/>
           </a:xfrm>
           <a:prstGeom prst="rect">
@@ -20286,7 +20404,7 @@
         </p:blipFill>
         <p:spPr>
           <a:xfrm>
-            <a:off x="8582577" y="2507907"/>
+            <a:off x="8391215" y="2507907"/>
             <a:ext cx="566530" cy="231647"/>
           </a:xfrm>
           <a:prstGeom prst="rect">
@@ -20302,7 +20420,7 @@
         </p:nvSpPr>
         <p:spPr>
           <a:xfrm>
-            <a:off x="9149107" y="2434888"/>
+            <a:off x="8957746" y="2434888"/>
             <a:ext cx="343246" cy="377686"/>
           </a:xfrm>
           <a:prstGeom prst="rect">
@@ -20345,7 +20463,7 @@
         </p:blipFill>
         <p:spPr>
           <a:xfrm>
-            <a:off x="9355194" y="2506648"/>
+            <a:off x="9163832" y="2506648"/>
             <a:ext cx="556458" cy="234165"/>
           </a:xfrm>
           <a:prstGeom prst="rect">
@@ -20361,7 +20479,7 @@
         </p:nvSpPr>
         <p:spPr>
           <a:xfrm>
-            <a:off x="9911653" y="2434888"/>
+            <a:off x="9720291" y="2434888"/>
             <a:ext cx="265713" cy="377686"/>
           </a:xfrm>
           <a:prstGeom prst="rect">
@@ -20460,7 +20578,7 @@
       </p:sp>
       <p:pic>
         <p:nvPicPr>
-          <p:cNvPr id="36" name="Picture 35" descr="6f3371b3f4bbf6b9.png"/>
+          <p:cNvPr id="36" name="Picture 35" descr="324b66480ae87fb4.png"/>
           <p:cNvPicPr>
             <a:picLocks noChangeAspect="1"/>
           </p:cNvPicPr>
@@ -20475,7 +20593,7 @@
         <p:spPr>
           <a:xfrm>
             <a:off x="5926350" y="2974582"/>
-            <a:ext cx="974432" cy="234165"/>
+            <a:ext cx="878751" cy="234165"/>
           </a:xfrm>
           <a:prstGeom prst="rect">
             <a:avLst/>
@@ -20490,7 +20608,7 @@
         </p:nvSpPr>
         <p:spPr>
           <a:xfrm>
-            <a:off x="6900783" y="2902822"/>
+            <a:off x="6805102" y="2902822"/>
             <a:ext cx="2329422" cy="377686"/>
           </a:xfrm>
           <a:prstGeom prst="rect">
@@ -20533,7 +20651,7 @@
         </p:blipFill>
         <p:spPr>
           <a:xfrm>
-            <a:off x="9093046" y="2975841"/>
+            <a:off x="8997365" y="2975841"/>
             <a:ext cx="564012" cy="231647"/>
           </a:xfrm>
           <a:prstGeom prst="rect">
@@ -20549,7 +20667,7 @@
         </p:nvSpPr>
         <p:spPr>
           <a:xfrm>
-            <a:off x="9657058" y="2902822"/>
+            <a:off x="9561377" y="2902822"/>
             <a:ext cx="1639121" cy="377686"/>
           </a:xfrm>
           <a:prstGeom prst="rect">
@@ -20742,7 +20860,7 @@
       </p:sp>
       <p:pic>
         <p:nvPicPr>
-          <p:cNvPr id="45" name="Picture 44" descr="06d2d48467fcd0c7.png"/>
+          <p:cNvPr id="45" name="Picture 44" descr="383f37ada98a3462.png"/>
           <p:cNvPicPr>
             <a:picLocks noChangeAspect="1"/>
           </p:cNvPicPr>
@@ -20757,7 +20875,7 @@
         <p:spPr>
           <a:xfrm>
             <a:off x="8140443" y="3811126"/>
-            <a:ext cx="815803" cy="231647"/>
+            <a:ext cx="720123" cy="231647"/>
           </a:xfrm>
           <a:prstGeom prst="rect">
             <a:avLst/>
@@ -20772,7 +20890,7 @@
         </p:nvSpPr>
         <p:spPr>
           <a:xfrm>
-            <a:off x="8956247" y="3738106"/>
+            <a:off x="8860566" y="3738106"/>
             <a:ext cx="2518009" cy="377686"/>
           </a:xfrm>
           <a:prstGeom prst="rect">
@@ -20906,7 +21024,7 @@
       </p:sp>
       <p:pic>
         <p:nvPicPr>
-          <p:cNvPr id="50" name="Picture 49" descr="6d8814c221810b96.png"/>
+          <p:cNvPr id="50" name="Picture 49" descr="322e6c6f3990ed6a.png"/>
           <p:cNvPicPr>
             <a:picLocks noChangeAspect="1"/>
           </p:cNvPicPr>
@@ -20921,7 +21039,7 @@
         <p:spPr>
           <a:xfrm>
             <a:off x="4477358" y="4645152"/>
-            <a:ext cx="961842" cy="234165"/>
+            <a:ext cx="866162" cy="234165"/>
           </a:xfrm>
           <a:prstGeom prst="rect">
             <a:avLst/>
@@ -20936,7 +21054,7 @@
         </p:nvSpPr>
         <p:spPr>
           <a:xfrm>
-            <a:off x="5439201" y="4573391"/>
+            <a:off x="5343520" y="4573391"/>
             <a:ext cx="343246" cy="377686"/>
           </a:xfrm>
           <a:prstGeom prst="rect">
@@ -20965,7 +21083,7 @@
       </p:sp>
       <p:pic>
         <p:nvPicPr>
-          <p:cNvPr id="52" name="Picture 51" descr="209a3bec006696ba.png"/>
+          <p:cNvPr id="52" name="Picture 51" descr="6d96e9ef855f92fc.png"/>
           <p:cNvPicPr>
             <a:picLocks noChangeAspect="1"/>
           </p:cNvPicPr>
@@ -20979,8 +21097,8 @@
         </p:blipFill>
         <p:spPr>
           <a:xfrm>
-            <a:off x="5645288" y="4645152"/>
-            <a:ext cx="815803" cy="234165"/>
+            <a:off x="5549607" y="4645152"/>
+            <a:ext cx="720123" cy="234165"/>
           </a:xfrm>
           <a:prstGeom prst="rect">
             <a:avLst/>
@@ -20995,7 +21113,7 @@
         </p:nvSpPr>
         <p:spPr>
           <a:xfrm>
-            <a:off x="6461091" y="4573391"/>
+            <a:off x="6269730" y="4573391"/>
             <a:ext cx="343246" cy="377686"/>
           </a:xfrm>
           <a:prstGeom prst="rect">
@@ -21038,7 +21156,7 @@
         </p:blipFill>
         <p:spPr>
           <a:xfrm>
-            <a:off x="6667178" y="4645152"/>
+            <a:off x="6475817" y="4645152"/>
             <a:ext cx="715087" cy="234165"/>
           </a:xfrm>
           <a:prstGeom prst="rect">
@@ -21054,7 +21172,7 @@
         </p:nvSpPr>
         <p:spPr>
           <a:xfrm>
-            <a:off x="7382265" y="4573391"/>
+            <a:off x="7190904" y="4573391"/>
             <a:ext cx="798851" cy="377686"/>
           </a:xfrm>
           <a:prstGeom prst="rect">
@@ -21097,7 +21215,7 @@
         </p:blipFill>
         <p:spPr>
           <a:xfrm>
-            <a:off x="8043956" y="4645152"/>
+            <a:off x="7852595" y="4645152"/>
             <a:ext cx="861126" cy="234165"/>
           </a:xfrm>
           <a:prstGeom prst="rect">
@@ -21113,7 +21231,7 @@
         </p:nvSpPr>
         <p:spPr>
           <a:xfrm>
-            <a:off x="8905083" y="4573391"/>
+            <a:off x="8713721" y="4573391"/>
             <a:ext cx="1977827" cy="377686"/>
           </a:xfrm>
           <a:prstGeom prst="rect">
@@ -23889,7 +24007,7 @@
         </p:nvSpPr>
         <p:spPr>
           <a:xfrm>
-            <a:off x="1856142" y="1440180"/>
+            <a:off x="1971299" y="1440180"/>
             <a:ext cx="3987983" cy="457200"/>
           </a:xfrm>
           <a:prstGeom prst="rect">
@@ -23918,7 +24036,7 @@
       </p:sp>
       <p:pic>
         <p:nvPicPr>
-          <p:cNvPr id="9" name="Picture 8" descr="2b82d6ff52fd29a2.png"/>
+          <p:cNvPr id="9" name="Picture 8" descr="22e665c31af511aa.png"/>
           <p:cNvPicPr>
             <a:picLocks noChangeAspect="1"/>
           </p:cNvPicPr>
@@ -23932,8 +24050,8 @@
         </p:blipFill>
         <p:spPr>
           <a:xfrm>
-            <a:off x="5706965" y="1560195"/>
-            <a:ext cx="1381887" cy="282321"/>
+            <a:off x="5822122" y="1560195"/>
+            <a:ext cx="1265491" cy="282321"/>
           </a:xfrm>
           <a:prstGeom prst="rect">
             <a:avLst/>
@@ -23948,7 +24066,7 @@
         </p:nvSpPr>
         <p:spPr>
           <a:xfrm>
-            <a:off x="7088852" y="1440180"/>
+            <a:off x="7087614" y="1440180"/>
             <a:ext cx="378166" cy="457200"/>
           </a:xfrm>
           <a:prstGeom prst="rect">
@@ -23977,7 +24095,7 @@
       </p:sp>
       <p:pic>
         <p:nvPicPr>
-          <p:cNvPr id="11" name="Picture 10" descr="6168aa1b708cf375.png"/>
+          <p:cNvPr id="11" name="Picture 10" descr="c7c83211ba327c5a.png"/>
           <p:cNvPicPr>
             <a:picLocks noChangeAspect="1"/>
           </p:cNvPicPr>
@@ -23991,8 +24109,8 @@
         </p:blipFill>
         <p:spPr>
           <a:xfrm>
-            <a:off x="7329858" y="1560195"/>
-            <a:ext cx="1156525" cy="282321"/>
+            <a:off x="7328620" y="1560195"/>
+            <a:ext cx="1042606" cy="282321"/>
           </a:xfrm>
           <a:prstGeom prst="rect">
             <a:avLst/>
@@ -24007,7 +24125,7 @@
         </p:nvSpPr>
         <p:spPr>
           <a:xfrm>
-            <a:off x="8486384" y="1440180"/>
+            <a:off x="8371226" y="1440180"/>
             <a:ext cx="953666" cy="457200"/>
           </a:xfrm>
           <a:prstGeom prst="rect">
@@ -24050,7 +24168,7 @@
         </p:blipFill>
         <p:spPr>
           <a:xfrm>
-            <a:off x="9302891" y="1557718"/>
+            <a:off x="9187733" y="1557718"/>
             <a:ext cx="859345" cy="284797"/>
           </a:xfrm>
           <a:prstGeom prst="rect">
@@ -24066,7 +24184,7 @@
         </p:nvSpPr>
         <p:spPr>
           <a:xfrm>
-            <a:off x="10162236" y="1440180"/>
+            <a:off x="10047079" y="1440180"/>
             <a:ext cx="280301" cy="457200"/>
           </a:xfrm>
           <a:prstGeom prst="rect">
